--- a/en/slides/07-Computer_Architecture-Verm1_Part_1-Lab.pptx
+++ b/en/slides/07-Computer_Architecture-Verm1_Part_1-Lab.pptx
@@ -124,19 +124,19 @@
   <p:extLst>
     <p:ext uri="{521415D9-36F7-43E2-AB2F-B90AF26B5E84}">
       <p14:sectionLst xmlns:p14="http://schemas.microsoft.com/office/powerpoint/2010/main">
-        <p14:section name="Opening" id="{ab141f6d-c722-c307-ba4c-1aed48f378f0}">
+        <p14:section name="Opening" id="{02f3784b-d2f6-5b29-fbed-b4e438be0114}">
           <p14:sldIdLst>
             <p14:sldId id="256"/>
             <p14:sldId id="257"/>
           </p14:sldIdLst>
         </p14:section>
-        <p14:section name="Step 0: the working loop" id="{bc597451-d9a5-224e-d586-1c656c74bab1}">
+        <p14:section name="Step 0: the working loop" id="{2056538e-6fcc-5d16-aafb-ff9ee75e71b3}">
           <p14:sldIdLst>
             <p14:sldId id="258"/>
             <p14:sldId id="259"/>
           </p14:sldIdLst>
         </p14:section>
-        <p14:section name="Step 2: a grid and a head" id="{1d2c4303-a7ed-7add-a9c9-f6d6a4043525}">
+        <p14:section name="Step 2: a grid and a head" id="{23f80a25-ab36-fba4-ee15-bbf6a3087c8f}">
           <p14:sldIdLst>
             <p14:sldId id="260"/>
             <p14:sldId id="261"/>
@@ -145,18 +145,18 @@
             <p14:sldId id="264"/>
           </p14:sldIdLst>
         </p14:section>
-        <p14:section name="Step 3: movement" id="{2bb79e35-323a-c617-eb7e-fa1e8c9707fe}">
+        <p14:section name="Step 3: movement" id="{ec62951f-eb64-308c-a40c-e9f66766439f}">
           <p14:sldIdLst>
             <p14:sldId id="265"/>
             <p14:sldId id="266"/>
           </p14:sldIdLst>
         </p14:section>
-        <p14:section name="Step 4: look inside with PRG32-QT" id="{695dbe82-2883-e20a-0e12-998406fd75a1}">
+        <p14:section name="Step 4: look inside with PRG32-QT" id="{9894c079-6671-4c70-4455-0fd6aa9e8c45}">
           <p14:sldIdLst>
             <p14:sldId id="267"/>
           </p14:sldIdLst>
         </p14:section>
-        <p14:section name="Run it and test it" id="{b3982832-b48d-e4a4-6df4-13bf94c707b8}">
+        <p14:section name="Run it and test it" id="{39520fcd-60c3-74a4-48d0-5832679df475}">
           <p14:sldIdLst>
             <p14:sldId id="268"/>
             <p14:sldId id="269"/>
@@ -165,7 +165,7 @@
             <p14:sldId id="272"/>
           </p14:sldIdLst>
         </p14:section>
-        <p14:section name="Exercises" id="{b0576365-d72f-304f-808d-583a640d7c5b}">
+        <p14:section name="Exercises" id="{b1183e76-5115-3adc-8e8b-4e97ad192233}">
           <p14:sldIdLst>
             <p14:sldId id="273"/>
           </p14:sldIdLst>

--- a/en/slides/07-Computer_Architecture-Verm1_Part_1-Lab.pptx
+++ b/en/slides/07-Computer_Architecture-Verm1_Part_1-Lab.pptx
@@ -124,19 +124,19 @@
   <p:extLst>
     <p:ext uri="{521415D9-36F7-43E2-AB2F-B90AF26B5E84}">
       <p14:sectionLst xmlns:p14="http://schemas.microsoft.com/office/powerpoint/2010/main">
-        <p14:section name="Opening" id="{02f3784b-d2f6-5b29-fbed-b4e438be0114}">
+        <p14:section name="Opening" id="{48ede149-0b80-90bc-b5e0-a50a4874e3bb}">
           <p14:sldIdLst>
             <p14:sldId id="256"/>
             <p14:sldId id="257"/>
           </p14:sldIdLst>
         </p14:section>
-        <p14:section name="Step 0: the working loop" id="{2056538e-6fcc-5d16-aafb-ff9ee75e71b3}">
+        <p14:section name="Step 0: the working loop" id="{b24716f8-3ad0-13ae-4999-0e1b3cc11925}">
           <p14:sldIdLst>
             <p14:sldId id="258"/>
             <p14:sldId id="259"/>
           </p14:sldIdLst>
         </p14:section>
-        <p14:section name="Step 2: a grid and a head" id="{23f80a25-ab36-fba4-ee15-bbf6a3087c8f}">
+        <p14:section name="Step 2: a grid and a head" id="{26fc95ba-b743-39b2-87f3-2edafe53ef38}">
           <p14:sldIdLst>
             <p14:sldId id="260"/>
             <p14:sldId id="261"/>
@@ -145,18 +145,18 @@
             <p14:sldId id="264"/>
           </p14:sldIdLst>
         </p14:section>
-        <p14:section name="Step 3: movement" id="{ec62951f-eb64-308c-a40c-e9f66766439f}">
+        <p14:section name="Step 3: movement" id="{cf4bd017-1ebe-3d43-5a61-cda657f421d6}">
           <p14:sldIdLst>
             <p14:sldId id="265"/>
             <p14:sldId id="266"/>
           </p14:sldIdLst>
         </p14:section>
-        <p14:section name="Step 4: look inside with PRG32-QT" id="{9894c079-6671-4c70-4455-0fd6aa9e8c45}">
+        <p14:section name="Step 4: look inside with PRG32-QT" id="{8ea6b750-4293-671e-d4d7-ea9819c44805}">
           <p14:sldIdLst>
             <p14:sldId id="267"/>
           </p14:sldIdLst>
         </p14:section>
-        <p14:section name="Run it and test it" id="{39520fcd-60c3-74a4-48d0-5832679df475}">
+        <p14:section name="Run it and test it" id="{80dec992-66da-7826-bce4-6e37a4f84c20}">
           <p14:sldIdLst>
             <p14:sldId id="268"/>
             <p14:sldId id="269"/>
@@ -165,7 +165,7 @@
             <p14:sldId id="272"/>
           </p14:sldIdLst>
         </p14:section>
-        <p14:section name="Exercises" id="{b1183e76-5115-3adc-8e8b-4e97ad192233}">
+        <p14:section name="Exercises" id="{bb97e0c9-4909-061c-d550-7d6f8c45641f}">
           <p14:sldIdLst>
             <p14:sldId id="273"/>
           </p14:sldIdLst>
@@ -576,7 +576,9 @@
               <a:rPr lang="en-US" dirty="0"/>
               <a:t>This is the code deck of Lecture 07. Where the lecture deck develops the concepts, this deck contains everything that is written and executed: each listing with its commentary, the complete program of the lecture, the output it is expected to produce, and the procedure for testing it on each of the three hosts. The two decks are meant to be read together: the concepts explain the code, and the code gives the concepts an observable consequence.
 Learning status: UNDERSTAND NOW, by the end of this lecture you explain it, trace it and apply it on your own; USE NOW, you follow and use the recipe today; how it works inside is explained later, or is not part of the course; UNDERSTAND LATER, recognise the name and what it is for; a later lecture explains it. A slide without a badge is context: a story, an example, a question, an exercise.
-Learning status of this lecture. UNDERSTAND NOW: the Verm1 project; the init, update, draw contract; a colour is a number; arrays in memory; .text, .rodata, .data; address, value, load, store; why ra is saved; shifts as multiplications; fixed point; pseudo-instructions; little-endian byte order. USE NOW: the PRG32 tools, the PRG32-QT debugger (used, not studied, in this course). UNDERSTAND LATER: instruction formats (Lecture 19). A slide without a badge is context: a story, an example, a question, an exercise.</a:t>
+Learning status of this lecture. UNDERSTAND NOW: the Verm1 project; the init, update, draw contract; a colour is a number; arrays in memory; .text, .rodata, .data; address, value, load, store; why ra is saved; shifts as multiplications; fixed point; pseudo-instructions; little-endian byte order. USE NOW: the PRG32 tools, the PRG32-QT debugger (used, not studied, in this course). UNDERSTAND LATER: instruction formats (Lecture 19). A slide without a badge is context: a story, an example, a question, an exercise.
+Roadmap. Today's outcomes: (1) build a cartridge from an empty file: a grid, a title and a moving head; (2) place constants and variables in the right section, .rodata or .data; (3) control a speed with a fixed-point accumulator. Builds on: the init, update, draw contract (Lecture 02); a colour is a number (Lecture 04); arrays in memory (Lecture 04); address, value, load, store (Lecture 02); why ra is saved (Lecture 02). Next: Lecture 08, Elements of Boolean Algebra.
+Bridge. In Lecture 02 step 2 saved ra on the stack before its calls, and lw t1, 0(t0) read a word at the address in t0. Today verm1_draw saves ra and verm1_update does not, and every variable of Verm1 is read with la and lw. Lecture 18 explains the stack and the calling convention; Lecture 19 names the addressing modes. Recall: Why does verm1_draw save ra while verm1_update does not?</a:t>
             </a:r>
             <a:endParaRPr lang="en-US" dirty="0"/>
           </a:p>
